--- a/tools/testdaten/beispiel.pptx
+++ b/tools/testdaten/beispiel.pptx
@@ -4058,11 +4058,16 @@
                     <a:lstStyle/>
                     <a:p>
                       <a:r>
+                        <a:rPr b="1"/>
                         <a:t>2100 h</a:t>
                       </a:r>
                     </a:p>
                   </a:txBody>
-                  <a:tcPr/>
+                  <a:tcPr>
+                    <a:solidFill>
+                      <a:srgbClr val="FFE082"/>
+                    </a:solidFill>
+                  </a:tcPr>
                 </a:tc>
               </a:tr>
             </a:tbl>
@@ -4224,7 +4229,7 @@
         <p:spPr>
           <a:xfrm>
             <a:off x="457200" y="365760"/>
-            <a:ext cx="8229600" cy="1097280"/>
+            <a:ext cx="8229600" cy="1463040"/>
           </a:xfrm>
           <a:prstGeom prst="rect">
             <a:avLst/>
@@ -4245,6 +4250,26 @@
                 <a:latin typeface="Georgia"/>
               </a:rPr>
               <a:t>Zusatz für Schnelle</a:t>
+            </a:r>
+          </a:p>
+          <a:p>
+            <a:r>
+              <a:rPr sz="2000" b="0">
+                <a:solidFill>
+                  <a:srgbClr val="1F2933"/>
+                </a:solidFill>
+                <a:latin typeface="Georgia"/>
+              </a:rPr>
+              <a:t>nur </a:t>
+            </a:r>
+            <a:r>
+              <a:rPr sz="2000" b="0">
+                <a:solidFill>
+                  <a:srgbClr val="065A82"/>
+                </a:solidFill>
+                <a:latin typeface="Georgia"/>
+              </a:rPr>
+              <a:t>kurz</a:t>
             </a:r>
           </a:p>
         </p:txBody>

--- a/tools/testdaten/beispiel.pptx
+++ b/tools/testdaten/beispiel.pptx
@@ -4274,9 +4274,78 @@
           </a:p>
         </p:txBody>
       </p:sp>
+      <p:sp>
+        <p:nvSpPr>
+          <p:cNvPr id="3" name="Rounded Rectangle 2"/>
+          <p:cNvSpPr/>
+          <p:nvPr/>
+        </p:nvSpPr>
+        <p:spPr>
+          <a:xfrm>
+            <a:off x="457200" y="4937760"/>
+            <a:ext cx="8229600" cy="1645920"/>
+          </a:xfrm>
+          <a:prstGeom prst="roundRect">
+            <a:avLst/>
+          </a:prstGeom>
+          <a:solidFill>
+            <a:srgbClr val="FDFBF7"/>
+          </a:solidFill>
+        </p:spPr>
+        <p:style>
+          <a:lnRef idx="1">
+            <a:schemeClr val="accent1"/>
+          </a:lnRef>
+          <a:fillRef idx="3">
+            <a:schemeClr val="accent1"/>
+          </a:fillRef>
+          <a:effectRef idx="2">
+            <a:schemeClr val="accent1"/>
+          </a:effectRef>
+          <a:fontRef idx="minor">
+            <a:schemeClr val="lt1"/>
+          </a:fontRef>
+        </p:style>
+        <p:txBody>
+          <a:bodyPr rtlCol="0" anchor="ctr"/>
+          <a:lstStyle/>
+          <a:p>
+            <a:pPr algn="ctr"/>
+          </a:p>
+        </p:txBody>
+      </p:sp>
+      <p:sp>
+        <p:nvSpPr>
+          <p:cNvPr id="4" name="TextBox 3"/>
+          <p:cNvSpPr txBox="1"/>
+          <p:nvPr/>
+        </p:nvSpPr>
+        <p:spPr>
+          <a:xfrm>
+            <a:off x="731520" y="5029200"/>
+            <a:ext cx="2743200" cy="274320"/>
+          </a:xfrm>
+          <a:prstGeom prst="rect">
+            <a:avLst/>
+          </a:prstGeom>
+          <a:noFill/>
+        </p:spPr>
+        <p:txBody>
+          <a:bodyPr wrap="none">
+            <a:spAutoFit/>
+          </a:bodyPr>
+          <a:lstStyle/>
+          <a:p>
+            <a:r>
+              <a:rPr sz="2800"/>
+              <a:t>Auftrag</a:t>
+            </a:r>
+          </a:p>
+        </p:txBody>
+      </p:sp>
       <p:graphicFrame>
         <p:nvGraphicFramePr>
-          <p:cNvPr id="3" name="Chart 2"/>
+          <p:cNvPr id="5" name="Chart 4"/>
           <p:cNvGraphicFramePr>
             <a:graphicFrameLocks noGrp="1"/>
           </p:cNvGraphicFramePr>
@@ -4294,7 +4363,7 @@
       </p:graphicFrame>
       <p:pic>
         <p:nvPicPr>
-          <p:cNvPr id="4" name="movie.mp4">
+          <p:cNvPr id="6" name="movie.mp4">
             <a:hlinkClick r:id="" action="ppaction://media"/>
           </p:cNvPr>
           <p:cNvPicPr>
@@ -4343,7 +4412,7 @@
                   </p:stCondLst>
                 </p:cTn>
                 <p:tgtEl>
-                  <p:spTgt spid="4"/>
+                  <p:spTgt spid="6"/>
                 </p:tgtEl>
               </p:cMediaNode>
             </p:video>
